--- a/time_period/cashdesk_final_algorithm_presentation.pptx
+++ b/time_period/cashdesk_final_algorithm_presentation.pptx
@@ -10,6 +10,7 @@
     <p:sldId id="258" r:id="rId9"/>
     <p:sldId id="259" r:id="rId10"/>
     <p:sldId id="260" r:id="rId11"/>
+    <p:sldId id="261" r:id="rId12"/>
   </p:sldIdLst>
   <p:sldSz cx="12191695" cy="6858000" type="screen4x3"/>
   <p:notesSz cx="6858000" cy="9144000"/>
@@ -3545,7 +3546,7 @@
                 </a:solidFill>
                 <a:latin typeface="Calibri"/>
               </a:rPr>
-              <a:t>1 / 5</a:t>
+              <a:t>1 / 6</a:t>
             </a:r>
           </a:p>
         </p:txBody>
@@ -4468,7 +4469,7 @@
                 </a:solidFill>
                 <a:latin typeface="Calibri"/>
               </a:rPr>
-              <a:t>2 / 5</a:t>
+              <a:t>2 / 6</a:t>
             </a:r>
           </a:p>
         </p:txBody>
@@ -5128,7 +5129,7 @@
                 </a:solidFill>
                 <a:latin typeface="Calibri"/>
               </a:rPr>
-              <a:t>3 / 5</a:t>
+              <a:t>3 / 6</a:t>
             </a:r>
           </a:p>
         </p:txBody>
@@ -5814,7 +5815,7 @@
                 </a:solidFill>
                 <a:latin typeface="Calibri"/>
               </a:rPr>
-              <a:t>4 / 5</a:t>
+              <a:t>4 / 6</a:t>
             </a:r>
           </a:p>
         </p:txBody>
@@ -6325,7 +6326,960 @@
                 </a:solidFill>
                 <a:latin typeface="Calibri"/>
               </a:rPr>
-              <a:t>5 / 5</a:t>
+              <a:t>5 / 6</a:t>
+            </a:r>
+          </a:p>
+        </p:txBody>
+      </p:sp>
+    </p:spTree>
+  </p:cSld>
+  <p:clrMapOvr>
+    <a:masterClrMapping/>
+  </p:clrMapOvr>
+</p:sld>
+</file>
+
+<file path=ppt/slides/slide6.xml><?xml version="1.0" encoding="utf-8"?>
+<p:sld xmlns:a="http://schemas.openxmlformats.org/drawingml/2006/main" xmlns:p="http://schemas.openxmlformats.org/presentationml/2006/main" xmlns:r="http://schemas.openxmlformats.org/officeDocument/2006/relationships">
+  <p:cSld>
+    <p:spTree>
+      <p:nvGrpSpPr>
+        <p:cNvPr id="1" name=""/>
+        <p:cNvGrpSpPr/>
+        <p:nvPr/>
+      </p:nvGrpSpPr>
+      <p:grpSpPr/>
+      <p:sp>
+        <p:nvSpPr>
+          <p:cNvPr id="2" name="TextBox 1"/>
+          <p:cNvSpPr txBox="1"/>
+          <p:nvPr/>
+        </p:nvSpPr>
+        <p:spPr>
+          <a:xfrm>
+            <a:off x="640080" y="320040"/>
+            <a:ext cx="10058400" cy="274320"/>
+          </a:xfrm>
+          <a:prstGeom prst="rect">
+            <a:avLst/>
+          </a:prstGeom>
+          <a:noFill/>
+        </p:spPr>
+        <p:txBody>
+          <a:bodyPr wrap="square">
+            <a:spAutoFit/>
+          </a:bodyPr>
+          <a:lstStyle/>
+          <a:p>
+            <a:pPr algn="l"/>
+            <a:r>
+              <a:rPr sz="1300" b="1">
+                <a:solidFill>
+                  <a:srgbClr val="2457A7"/>
+                </a:solidFill>
+                <a:latin typeface="Calibri"/>
+              </a:rPr>
+              <a:t>ПРОГНОЗ SALDO_TURN</a:t>
+            </a:r>
+          </a:p>
+        </p:txBody>
+      </p:sp>
+      <p:sp>
+        <p:nvSpPr>
+          <p:cNvPr id="3" name="TextBox 2"/>
+          <p:cNvSpPr txBox="1"/>
+          <p:nvPr/>
+        </p:nvSpPr>
+        <p:spPr>
+          <a:xfrm>
+            <a:off x="640080" y="640080"/>
+            <a:ext cx="10515600" cy="457200"/>
+          </a:xfrm>
+          <a:prstGeom prst="rect">
+            <a:avLst/>
+          </a:prstGeom>
+          <a:noFill/>
+        </p:spPr>
+        <p:txBody>
+          <a:bodyPr wrap="square">
+            <a:spAutoFit/>
+          </a:bodyPr>
+          <a:lstStyle/>
+          <a:p>
+            <a:pPr algn="l"/>
+            <a:r>
+              <a:rPr sz="2800" b="1">
+                <a:solidFill>
+                  <a:srgbClr val="172033"/>
+                </a:solidFill>
+                <a:latin typeface="Calibri"/>
+              </a:rPr>
+              <a:t>Дневной денежный поток</a:t>
+            </a:r>
+          </a:p>
+        </p:txBody>
+      </p:sp>
+      <p:sp>
+        <p:nvSpPr>
+          <p:cNvPr id="4" name="TextBox 3"/>
+          <p:cNvSpPr txBox="1"/>
+          <p:nvPr/>
+        </p:nvSpPr>
+        <p:spPr>
+          <a:xfrm>
+            <a:off x="640080" y="1143000"/>
+            <a:ext cx="10789920" cy="502920"/>
+          </a:xfrm>
+          <a:prstGeom prst="rect">
+            <a:avLst/>
+          </a:prstGeom>
+          <a:noFill/>
+        </p:spPr>
+        <p:txBody>
+          <a:bodyPr wrap="square">
+            <a:spAutoFit/>
+          </a:bodyPr>
+          <a:lstStyle/>
+          <a:p>
+            <a:pPr algn="l"/>
+            <a:r>
+              <a:rPr sz="1500" b="0">
+                <a:solidFill>
+                  <a:srgbClr val="5F6B7A"/>
+                </a:solidFill>
+                <a:latin typeface="Calibri"/>
+              </a:rPr>
+              <a:t>atdtmco_saldo_turn прогнозируется отдельно: guarded SARIMA на истории до D−2. Иерархическая калибровка и адаптивный квантиль относятся только к NS.</a:t>
+            </a:r>
+          </a:p>
+        </p:txBody>
+      </p:sp>
+      <p:sp>
+        <p:nvSpPr>
+          <p:cNvPr id="5" name="Rounded Rectangle 4"/>
+          <p:cNvSpPr/>
+          <p:nvPr/>
+        </p:nvSpPr>
+        <p:spPr>
+          <a:xfrm>
+            <a:off x="640080" y="1737360"/>
+            <a:ext cx="3566160" cy="1417320"/>
+          </a:xfrm>
+          <a:prstGeom prst="roundRect">
+            <a:avLst>
+              <a:gd name="adj" fmla="val 8000"/>
+            </a:avLst>
+          </a:prstGeom>
+          <a:solidFill>
+            <a:srgbClr val="F5F7FA"/>
+          </a:solidFill>
+          <a:ln>
+            <a:solidFill>
+              <a:srgbClr val="DCE2EA"/>
+            </a:solidFill>
+          </a:ln>
+        </p:spPr>
+        <p:style>
+          <a:lnRef idx="1">
+            <a:schemeClr val="accent1"/>
+          </a:lnRef>
+          <a:fillRef idx="3">
+            <a:schemeClr val="accent1"/>
+          </a:fillRef>
+          <a:effectRef idx="2">
+            <a:schemeClr val="accent1"/>
+          </a:effectRef>
+          <a:fontRef idx="minor">
+            <a:schemeClr val="lt1"/>
+          </a:fontRef>
+        </p:style>
+        <p:txBody>
+          <a:bodyPr rtlCol="0" anchor="ctr" wrap="square"/>
+          <a:lstStyle/>
+          <a:p>
+            <a:pPr algn="ctr"/>
+            <a:r>
+              <a:rPr sz="1500" b="1">
+                <a:solidFill>
+                  <a:srgbClr val="172033"/>
+                </a:solidFill>
+                <a:latin typeface="Calibri"/>
+              </a:rPr>
+              <a:t>Что это</a:t>
+            </a:r>
+          </a:p>
+          <a:p>
+            <a:pPr>
+              <a:spcBef>
+                <a:spcPts val="600"/>
+              </a:spcBef>
+            </a:pPr>
+            <a:r>
+              <a:rPr sz="1200" b="0">
+                <a:solidFill>
+                  <a:srgbClr val="5F6B7A"/>
+                </a:solidFill>
+                <a:latin typeface="Calibri"/>
+              </a:rPr>
+              <a:t>Дневной денежный поток кассы. Отдельный временной ряд, не связанный напрямую с риском невыдачи NS.</a:t>
+            </a:r>
+          </a:p>
+        </p:txBody>
+      </p:sp>
+      <p:sp>
+        <p:nvSpPr>
+          <p:cNvPr id="6" name="Rounded Rectangle 5"/>
+          <p:cNvSpPr/>
+          <p:nvPr/>
+        </p:nvSpPr>
+        <p:spPr>
+          <a:xfrm>
+            <a:off x="4389120" y="1737360"/>
+            <a:ext cx="3566160" cy="1417320"/>
+          </a:xfrm>
+          <a:prstGeom prst="roundRect">
+            <a:avLst>
+              <a:gd name="adj" fmla="val 8000"/>
+            </a:avLst>
+          </a:prstGeom>
+          <a:solidFill>
+            <a:srgbClr val="F5F7FA"/>
+          </a:solidFill>
+          <a:ln>
+            <a:solidFill>
+              <a:srgbClr val="DCE2EA"/>
+            </a:solidFill>
+          </a:ln>
+        </p:spPr>
+        <p:style>
+          <a:lnRef idx="1">
+            <a:schemeClr val="accent1"/>
+          </a:lnRef>
+          <a:fillRef idx="3">
+            <a:schemeClr val="accent1"/>
+          </a:fillRef>
+          <a:effectRef idx="2">
+            <a:schemeClr val="accent1"/>
+          </a:effectRef>
+          <a:fontRef idx="minor">
+            <a:schemeClr val="lt1"/>
+          </a:fontRef>
+        </p:style>
+        <p:txBody>
+          <a:bodyPr rtlCol="0" anchor="ctr" wrap="square"/>
+          <a:lstStyle/>
+          <a:p>
+            <a:pPr algn="ctr"/>
+            <a:r>
+              <a:rPr sz="1500" b="1">
+                <a:solidFill>
+                  <a:srgbClr val="172033"/>
+                </a:solidFill>
+                <a:latin typeface="Calibri"/>
+              </a:rPr>
+              <a:t>Как считаем</a:t>
+            </a:r>
+          </a:p>
+          <a:p>
+            <a:pPr>
+              <a:spcBef>
+                <a:spcPts val="600"/>
+              </a:spcBef>
+            </a:pPr>
+            <a:r>
+              <a:rPr sz="1200" b="0">
+                <a:solidFill>
+                  <a:srgbClr val="5F6B7A"/>
+                </a:solidFill>
+                <a:latin typeface="Calibri"/>
+              </a:rPr>
+              <a:t>Guarded SARIMA на 12 месяцах до T−2. При сбое модели — медианы по дням недели.</a:t>
+            </a:r>
+          </a:p>
+        </p:txBody>
+      </p:sp>
+      <p:sp>
+        <p:nvSpPr>
+          <p:cNvPr id="7" name="Rounded Rectangle 6"/>
+          <p:cNvSpPr/>
+          <p:nvPr/>
+        </p:nvSpPr>
+        <p:spPr>
+          <a:xfrm>
+            <a:off x="8138159" y="1737360"/>
+            <a:ext cx="3566160" cy="1417320"/>
+          </a:xfrm>
+          <a:prstGeom prst="roundRect">
+            <a:avLst>
+              <a:gd name="adj" fmla="val 8000"/>
+            </a:avLst>
+          </a:prstGeom>
+          <a:solidFill>
+            <a:srgbClr val="F5F7FA"/>
+          </a:solidFill>
+          <a:ln>
+            <a:solidFill>
+              <a:srgbClr val="DCE2EA"/>
+            </a:solidFill>
+          </a:ln>
+        </p:spPr>
+        <p:style>
+          <a:lnRef idx="1">
+            <a:schemeClr val="accent1"/>
+          </a:lnRef>
+          <a:fillRef idx="3">
+            <a:schemeClr val="accent1"/>
+          </a:fillRef>
+          <a:effectRef idx="2">
+            <a:schemeClr val="accent1"/>
+          </a:effectRef>
+          <a:fontRef idx="minor">
+            <a:schemeClr val="lt1"/>
+          </a:fontRef>
+        </p:style>
+        <p:txBody>
+          <a:bodyPr rtlCol="0" anchor="ctr" wrap="square"/>
+          <a:lstStyle/>
+          <a:p>
+            <a:pPr algn="ctr"/>
+            <a:r>
+              <a:rPr sz="1500" b="1">
+                <a:solidFill>
+                  <a:srgbClr val="172033"/>
+                </a:solidFill>
+                <a:latin typeface="Calibri"/>
+              </a:rPr>
+              <a:t>Чего нет</a:t>
+            </a:r>
+          </a:p>
+          <a:p>
+            <a:pPr>
+              <a:spcBef>
+                <a:spcPts val="600"/>
+              </a:spcBef>
+            </a:pPr>
+            <a:r>
+              <a:rPr sz="1200" b="0">
+                <a:solidFill>
+                  <a:srgbClr val="5F6B7A"/>
+                </a:solidFill>
+                <a:latin typeface="Calibri"/>
+              </a:rPr>
+              <a:t>Нет поправки по ошибкам и адаптивного квантиля. Это центральный прогноз потока.</a:t>
+            </a:r>
+          </a:p>
+        </p:txBody>
+      </p:sp>
+      <p:graphicFrame>
+        <p:nvGraphicFramePr>
+          <p:cNvPr id="8" name="Table 7"/>
+          <p:cNvGraphicFramePr>
+            <a:graphicFrameLocks noGrp="1"/>
+          </p:cNvGraphicFramePr>
+          <p:nvPr/>
+        </p:nvGraphicFramePr>
+        <p:xfrm>
+          <a:off x="457200" y="3383280"/>
+          <a:ext cx="11247120" cy="1234440"/>
+        </p:xfrm>
+        <a:graphic>
+          <a:graphicData uri="http://schemas.openxmlformats.org/drawingml/2006/table">
+            <a:tbl>
+              <a:tblPr firstRow="1" bandRow="1">
+                <a:tableStyleId>{5C22544A-7EE6-4342-B048-85BDC9FD1C3A}</a:tableStyleId>
+              </a:tblPr>
+              <a:tblGrid>
+                <a:gridCol w="2194560"/>
+                <a:gridCol w="1097280"/>
+                <a:gridCol w="914400"/>
+                <a:gridCol w="1371600"/>
+                <a:gridCol w="1371600"/>
+                <a:gridCol w="1371600"/>
+                <a:gridCol w="1371600"/>
+                <a:gridCol w="1554480"/>
+              </a:tblGrid>
+              <a:tr h="617220">
+                <a:tc>
+                  <a:txBody>
+                    <a:bodyPr/>
+                    <a:lstStyle/>
+                    <a:p>
+                      <a:pPr algn="l"/>
+                      <a:r>
+                        <a:rPr sz="1100" b="1">
+                          <a:solidFill>
+                            <a:srgbClr val="5F6B7A"/>
+                          </a:solidFill>
+                          <a:latin typeface="Calibri"/>
+                        </a:rPr>
+                        <a:t>Вариант</a:t>
+                      </a:r>
+                    </a:p>
+                  </a:txBody>
+                  <a:tcPr>
+                    <a:solidFill>
+                      <a:srgbClr val="F5F7FA"/>
+                    </a:solidFill>
+                  </a:tcPr>
+                </a:tc>
+                <a:tc>
+                  <a:txBody>
+                    <a:bodyPr/>
+                    <a:lstStyle/>
+                    <a:p>
+                      <a:pPr algn="r"/>
+                      <a:r>
+                        <a:rPr sz="1100" b="1">
+                          <a:solidFill>
+                            <a:srgbClr val="5F6B7A"/>
+                          </a:solidFill>
+                          <a:latin typeface="Calibri"/>
+                        </a:rPr>
+                        <a:t>Строк</a:t>
+                      </a:r>
+                    </a:p>
+                  </a:txBody>
+                  <a:tcPr>
+                    <a:solidFill>
+                      <a:srgbClr val="F5F7FA"/>
+                    </a:solidFill>
+                  </a:tcPr>
+                </a:tc>
+                <a:tc>
+                  <a:txBody>
+                    <a:bodyPr/>
+                    <a:lstStyle/>
+                    <a:p>
+                      <a:pPr algn="r"/>
+                      <a:r>
+                        <a:rPr sz="1100" b="1">
+                          <a:solidFill>
+                            <a:srgbClr val="5F6B7A"/>
+                          </a:solidFill>
+                          <a:latin typeface="Calibri"/>
+                        </a:rPr>
+                        <a:t>Касс</a:t>
+                      </a:r>
+                    </a:p>
+                  </a:txBody>
+                  <a:tcPr>
+                    <a:solidFill>
+                      <a:srgbClr val="F5F7FA"/>
+                    </a:solidFill>
+                  </a:tcPr>
+                </a:tc>
+                <a:tc>
+                  <a:txBody>
+                    <a:bodyPr/>
+                    <a:lstStyle/>
+                    <a:p>
+                      <a:pPr algn="r"/>
+                      <a:r>
+                        <a:rPr sz="1100" b="1">
+                          <a:solidFill>
+                            <a:srgbClr val="5F6B7A"/>
+                          </a:solidFill>
+                          <a:latin typeface="Calibri"/>
+                        </a:rPr>
+                        <a:t>MAE</a:t>
+                      </a:r>
+                    </a:p>
+                  </a:txBody>
+                  <a:tcPr>
+                    <a:solidFill>
+                      <a:srgbClr val="F5F7FA"/>
+                    </a:solidFill>
+                  </a:tcPr>
+                </a:tc>
+                <a:tc>
+                  <a:txBody>
+                    <a:bodyPr/>
+                    <a:lstStyle/>
+                    <a:p>
+                      <a:pPr algn="r"/>
+                      <a:r>
+                        <a:rPr sz="1100" b="1">
+                          <a:solidFill>
+                            <a:srgbClr val="5F6B7A"/>
+                          </a:solidFill>
+                          <a:latin typeface="Calibri"/>
+                        </a:rPr>
+                        <a:t>MAE95</a:t>
+                      </a:r>
+                    </a:p>
+                  </a:txBody>
+                  <a:tcPr>
+                    <a:solidFill>
+                      <a:srgbClr val="F5F7FA"/>
+                    </a:solidFill>
+                  </a:tcPr>
+                </a:tc>
+                <a:tc>
+                  <a:txBody>
+                    <a:bodyPr/>
+                    <a:lstStyle/>
+                    <a:p>
+                      <a:pPr algn="r"/>
+                      <a:r>
+                        <a:rPr sz="1100" b="1">
+                          <a:solidFill>
+                            <a:srgbClr val="5F6B7A"/>
+                          </a:solidFill>
+                          <a:latin typeface="Calibri"/>
+                        </a:rPr>
+                        <a:t>Медиана</a:t>
+                      </a:r>
+                    </a:p>
+                  </a:txBody>
+                  <a:tcPr>
+                    <a:solidFill>
+                      <a:srgbClr val="F5F7FA"/>
+                    </a:solidFill>
+                  </a:tcPr>
+                </a:tc>
+                <a:tc>
+                  <a:txBody>
+                    <a:bodyPr/>
+                    <a:lstStyle/>
+                    <a:p>
+                      <a:pPr algn="r"/>
+                      <a:r>
+                        <a:rPr sz="1100" b="1">
+                          <a:solidFill>
+                            <a:srgbClr val="5F6B7A"/>
+                          </a:solidFill>
+                          <a:latin typeface="Calibri"/>
+                        </a:rPr>
+                        <a:t>P90</a:t>
+                      </a:r>
+                    </a:p>
+                  </a:txBody>
+                  <a:tcPr>
+                    <a:solidFill>
+                      <a:srgbClr val="F5F7FA"/>
+                    </a:solidFill>
+                  </a:tcPr>
+                </a:tc>
+                <a:tc>
+                  <a:txBody>
+                    <a:bodyPr/>
+                    <a:lstStyle/>
+                    <a:p>
+                      <a:pPr algn="r"/>
+                      <a:r>
+                        <a:rPr sz="1100" b="1">
+                          <a:solidFill>
+                            <a:srgbClr val="5F6B7A"/>
+                          </a:solidFill>
+                          <a:latin typeface="Calibri"/>
+                        </a:rPr>
+                        <a:t>Смещение</a:t>
+                      </a:r>
+                    </a:p>
+                  </a:txBody>
+                  <a:tcPr>
+                    <a:solidFill>
+                      <a:srgbClr val="F5F7FA"/>
+                    </a:solidFill>
+                  </a:tcPr>
+                </a:tc>
+              </a:tr>
+              <a:tr h="617220">
+                <a:tc>
+                  <a:txBody>
+                    <a:bodyPr/>
+                    <a:lstStyle/>
+                    <a:p>
+                      <a:pPr algn="l"/>
+                      <a:r>
+                        <a:rPr sz="1300" b="1">
+                          <a:solidFill>
+                            <a:srgbClr val="172033"/>
+                          </a:solidFill>
+                          <a:latin typeface="Calibri"/>
+                        </a:rPr>
+                        <a:t>SARIMA saldo_turn</a:t>
+                      </a:r>
+                    </a:p>
+                  </a:txBody>
+                  <a:tcPr>
+                    <a:solidFill>
+                      <a:srgbClr val="EEF4FB"/>
+                    </a:solidFill>
+                  </a:tcPr>
+                </a:tc>
+                <a:tc>
+                  <a:txBody>
+                    <a:bodyPr/>
+                    <a:lstStyle/>
+                    <a:p>
+                      <a:pPr algn="r"/>
+                      <a:r>
+                        <a:rPr sz="1300" b="0">
+                          <a:solidFill>
+                            <a:srgbClr val="172033"/>
+                          </a:solidFill>
+                          <a:latin typeface="Calibri"/>
+                        </a:rPr>
+                        <a:t>4 753</a:t>
+                      </a:r>
+                    </a:p>
+                  </a:txBody>
+                  <a:tcPr>
+                    <a:solidFill>
+                      <a:srgbClr val="EEF4FB"/>
+                    </a:solidFill>
+                  </a:tcPr>
+                </a:tc>
+                <a:tc>
+                  <a:txBody>
+                    <a:bodyPr/>
+                    <a:lstStyle/>
+                    <a:p>
+                      <a:pPr algn="r"/>
+                      <a:r>
+                        <a:rPr sz="1300" b="0">
+                          <a:solidFill>
+                            <a:srgbClr val="172033"/>
+                          </a:solidFill>
+                          <a:latin typeface="Calibri"/>
+                        </a:rPr>
+                        <a:t>122</a:t>
+                      </a:r>
+                    </a:p>
+                  </a:txBody>
+                  <a:tcPr>
+                    <a:solidFill>
+                      <a:srgbClr val="EEF4FB"/>
+                    </a:solidFill>
+                  </a:tcPr>
+                </a:tc>
+                <a:tc>
+                  <a:txBody>
+                    <a:bodyPr/>
+                    <a:lstStyle/>
+                    <a:p>
+                      <a:pPr algn="r"/>
+                      <a:r>
+                        <a:rPr sz="1300" b="0">
+                          <a:solidFill>
+                            <a:srgbClr val="172033"/>
+                          </a:solidFill>
+                          <a:latin typeface="Calibri"/>
+                        </a:rPr>
+                        <a:t>4,62 млн</a:t>
+                      </a:r>
+                    </a:p>
+                  </a:txBody>
+                  <a:tcPr>
+                    <a:solidFill>
+                      <a:srgbClr val="EEF4FB"/>
+                    </a:solidFill>
+                  </a:tcPr>
+                </a:tc>
+                <a:tc>
+                  <a:txBody>
+                    <a:bodyPr/>
+                    <a:lstStyle/>
+                    <a:p>
+                      <a:pPr algn="r"/>
+                      <a:r>
+                        <a:rPr sz="1300" b="0">
+                          <a:solidFill>
+                            <a:srgbClr val="172033"/>
+                          </a:solidFill>
+                          <a:latin typeface="Calibri"/>
+                        </a:rPr>
+                        <a:t>2,93 млн</a:t>
+                      </a:r>
+                    </a:p>
+                  </a:txBody>
+                  <a:tcPr>
+                    <a:solidFill>
+                      <a:srgbClr val="EEF4FB"/>
+                    </a:solidFill>
+                  </a:tcPr>
+                </a:tc>
+                <a:tc>
+                  <a:txBody>
+                    <a:bodyPr/>
+                    <a:lstStyle/>
+                    <a:p>
+                      <a:pPr algn="r"/>
+                      <a:r>
+                        <a:rPr sz="1300" b="0">
+                          <a:solidFill>
+                            <a:srgbClr val="172033"/>
+                          </a:solidFill>
+                          <a:latin typeface="Calibri"/>
+                        </a:rPr>
+                        <a:t>1,61 млн</a:t>
+                      </a:r>
+                    </a:p>
+                  </a:txBody>
+                  <a:tcPr>
+                    <a:solidFill>
+                      <a:srgbClr val="EEF4FB"/>
+                    </a:solidFill>
+                  </a:tcPr>
+                </a:tc>
+                <a:tc>
+                  <a:txBody>
+                    <a:bodyPr/>
+                    <a:lstStyle/>
+                    <a:p>
+                      <a:pPr algn="r"/>
+                      <a:r>
+                        <a:rPr sz="1300" b="0">
+                          <a:solidFill>
+                            <a:srgbClr val="172033"/>
+                          </a:solidFill>
+                          <a:latin typeface="Calibri"/>
+                        </a:rPr>
+                        <a:t>9,37 млн</a:t>
+                      </a:r>
+                    </a:p>
+                  </a:txBody>
+                  <a:tcPr>
+                    <a:solidFill>
+                      <a:srgbClr val="EEF4FB"/>
+                    </a:solidFill>
+                  </a:tcPr>
+                </a:tc>
+                <a:tc>
+                  <a:txBody>
+                    <a:bodyPr/>
+                    <a:lstStyle/>
+                    <a:p>
+                      <a:pPr algn="r"/>
+                      <a:r>
+                        <a:rPr sz="1300" b="0">
+                          <a:solidFill>
+                            <a:srgbClr val="172033"/>
+                          </a:solidFill>
+                          <a:latin typeface="Calibri"/>
+                        </a:rPr>
+                        <a:t>+0,37 млн</a:t>
+                      </a:r>
+                    </a:p>
+                  </a:txBody>
+                  <a:tcPr>
+                    <a:solidFill>
+                      <a:srgbClr val="EEF4FB"/>
+                    </a:solidFill>
+                  </a:tcPr>
+                </a:tc>
+              </a:tr>
+            </a:tbl>
+          </a:graphicData>
+        </a:graphic>
+      </p:graphicFrame>
+      <p:sp>
+        <p:nvSpPr>
+          <p:cNvPr id="9" name="Rounded Rectangle 8"/>
+          <p:cNvSpPr/>
+          <p:nvPr/>
+        </p:nvSpPr>
+        <p:spPr>
+          <a:xfrm>
+            <a:off x="640080" y="4846320"/>
+            <a:ext cx="5303520" cy="1234440"/>
+          </a:xfrm>
+          <a:prstGeom prst="roundRect">
+            <a:avLst>
+              <a:gd name="adj" fmla="val 8000"/>
+            </a:avLst>
+          </a:prstGeom>
+          <a:solidFill>
+            <a:srgbClr val="E8F5EF"/>
+          </a:solidFill>
+          <a:ln>
+            <a:noFill/>
+          </a:ln>
+        </p:spPr>
+        <p:style>
+          <a:lnRef idx="1">
+            <a:schemeClr val="accent1"/>
+          </a:lnRef>
+          <a:fillRef idx="3">
+            <a:schemeClr val="accent1"/>
+          </a:fillRef>
+          <a:effectRef idx="2">
+            <a:schemeClr val="accent1"/>
+          </a:effectRef>
+          <a:fontRef idx="minor">
+            <a:schemeClr val="lt1"/>
+          </a:fontRef>
+        </p:style>
+        <p:txBody>
+          <a:bodyPr rtlCol="0" anchor="ctr" wrap="square"/>
+          <a:lstStyle/>
+          <a:p>
+            <a:pPr algn="ctr"/>
+            <a:r>
+              <a:rPr sz="1500" b="1">
+                <a:solidFill>
+                  <a:srgbClr val="1F6B4A"/>
+                </a:solidFill>
+                <a:latin typeface="Calibri"/>
+              </a:rPr>
+              <a:t>Как читать</a:t>
+            </a:r>
+          </a:p>
+          <a:p>
+            <a:pPr>
+              <a:spcBef>
+                <a:spcPts val="600"/>
+              </a:spcBef>
+            </a:pPr>
+            <a:r>
+              <a:rPr sz="1300" b="0">
+                <a:solidFill>
+                  <a:srgbClr val="1F6B4A"/>
+                </a:solidFill>
+                <a:latin typeface="Calibri"/>
+              </a:rPr>
+              <a:t>Типичная ошибка около 1,6 млн (медиана), MAE95 ≈ 2,93 млн. Смещение небольшое: +0,37 млн.</a:t>
+            </a:r>
+          </a:p>
+        </p:txBody>
+      </p:sp>
+      <p:sp>
+        <p:nvSpPr>
+          <p:cNvPr id="10" name="Rounded Rectangle 9"/>
+          <p:cNvSpPr/>
+          <p:nvPr/>
+        </p:nvSpPr>
+        <p:spPr>
+          <a:xfrm>
+            <a:off x="6217920" y="4846320"/>
+            <a:ext cx="5303520" cy="1234440"/>
+          </a:xfrm>
+          <a:prstGeom prst="roundRect">
+            <a:avLst>
+              <a:gd name="adj" fmla="val 8000"/>
+            </a:avLst>
+          </a:prstGeom>
+          <a:solidFill>
+            <a:srgbClr val="FFF4E0"/>
+          </a:solidFill>
+          <a:ln>
+            <a:noFill/>
+          </a:ln>
+        </p:spPr>
+        <p:style>
+          <a:lnRef idx="1">
+            <a:schemeClr val="accent1"/>
+          </a:lnRef>
+          <a:fillRef idx="3">
+            <a:schemeClr val="accent1"/>
+          </a:fillRef>
+          <a:effectRef idx="2">
+            <a:schemeClr val="accent1"/>
+          </a:effectRef>
+          <a:fontRef idx="minor">
+            <a:schemeClr val="lt1"/>
+          </a:fontRef>
+        </p:style>
+        <p:txBody>
+          <a:bodyPr rtlCol="0" anchor="ctr" wrap="square"/>
+          <a:lstStyle/>
+          <a:p>
+            <a:pPr algn="ctr"/>
+            <a:r>
+              <a:rPr sz="1500" b="1">
+                <a:solidFill>
+                  <a:srgbClr val="8A5A12"/>
+                </a:solidFill>
+                <a:latin typeface="Calibri"/>
+              </a:rPr>
+              <a:t>Важно</a:t>
+            </a:r>
+          </a:p>
+          <a:p>
+            <a:pPr>
+              <a:spcBef>
+                <a:spcPts val="600"/>
+              </a:spcBef>
+            </a:pPr>
+            <a:r>
+              <a:rPr sz="1300" b="0">
+                <a:solidFill>
+                  <a:srgbClr val="8A5A12"/>
+                </a:solidFill>
+                <a:latin typeface="Calibri"/>
+              </a:rPr>
+              <a:t>Закрытые дни в метриках исключены. Невыдачи и адаптивный квантиль — только для NS, не для saldo.</a:t>
+            </a:r>
+          </a:p>
+        </p:txBody>
+      </p:sp>
+      <p:sp>
+        <p:nvSpPr>
+          <p:cNvPr id="11" name="TextBox 10"/>
+          <p:cNvSpPr txBox="1"/>
+          <p:nvPr/>
+        </p:nvSpPr>
+        <p:spPr>
+          <a:xfrm>
+            <a:off x="548640" y="6446520"/>
+            <a:ext cx="5486400" cy="274320"/>
+          </a:xfrm>
+          <a:prstGeom prst="rect">
+            <a:avLst/>
+          </a:prstGeom>
+          <a:noFill/>
+        </p:spPr>
+        <p:txBody>
+          <a:bodyPr wrap="square">
+            <a:spAutoFit/>
+          </a:bodyPr>
+          <a:lstStyle/>
+          <a:p>
+            <a:pPr algn="l"/>
+            <a:r>
+              <a:rPr sz="1100" b="0">
+                <a:solidFill>
+                  <a:srgbClr val="5F6B7A"/>
+                </a:solidFill>
+                <a:latin typeface="Calibri"/>
+              </a:rPr>
+              <a:t>Кассовая потребность</a:t>
+            </a:r>
+          </a:p>
+        </p:txBody>
+      </p:sp>
+      <p:sp>
+        <p:nvSpPr>
+          <p:cNvPr id="12" name="TextBox 11"/>
+          <p:cNvSpPr txBox="1"/>
+          <p:nvPr/>
+        </p:nvSpPr>
+        <p:spPr>
+          <a:xfrm>
+            <a:off x="10515600" y="6446520"/>
+            <a:ext cx="1188720" cy="274320"/>
+          </a:xfrm>
+          <a:prstGeom prst="rect">
+            <a:avLst/>
+          </a:prstGeom>
+          <a:noFill/>
+        </p:spPr>
+        <p:txBody>
+          <a:bodyPr wrap="square">
+            <a:spAutoFit/>
+          </a:bodyPr>
+          <a:lstStyle/>
+          <a:p>
+            <a:pPr algn="r"/>
+            <a:r>
+              <a:rPr sz="1100" b="0">
+                <a:solidFill>
+                  <a:srgbClr val="5F6B7A"/>
+                </a:solidFill>
+                <a:latin typeface="Calibri"/>
+              </a:rPr>
+              <a:t>6 / 6</a:t>
             </a:r>
           </a:p>
         </p:txBody>
